--- a/classes/parte-0-fundamentos-y-prerrequisitos/009-powershell-para-seguridad-ofensiva-y-defensiva/clase-009-presentacion.pptx
+++ b/classes/parte-0-fundamentos-y-prerrequisitos/009-powershell-para-seguridad-ofensiva-y-defensiva/clase-009-presentacion.pptx
@@ -17,6 +17,10 @@
     <p:sldId id="265" r:id="rId16"/>
     <p:sldId id="266" r:id="rId17"/>
     <p:sldId id="267" r:id="rId18"/>
+    <p:sldId id="268" r:id="rId19"/>
+    <p:sldId id="269" r:id="rId20"/>
+    <p:sldId id="270" r:id="rId21"/>
+    <p:sldId id="271" r:id="rId22"/>
   </p:sldIdLst>
   <p:sldSz cx="9144000" cy="6858000" type="screen4x3"/>
   <p:notesSz cx="6858000" cy="9144000"/>
@@ -3198,7 +3202,7 @@
                   <a:srgbClr val="0B3D2E"/>
                 </a:solidFill>
               </a:rPr>
-              <a:t>⚠️ Errores comunes</a:t>
+              <a:t>✍️ Ejercicios</a:t>
             </a:r>
           </a:p>
         </p:txBody>
@@ -3236,67 +3240,97 @@
                   <a:srgbClr val="22282E"/>
                 </a:solidFill>
               </a:rPr>
-              <a:t>•  "running scripts is disabled on this system" — Execution Policy Restricted. Ajusta con Set-ExecutionPolicy (con permiso) o usa -File con política adecuada.</a:t>
-            </a:r>
-          </a:p>
-          <a:p>
-            <a:pPr>
-              <a:spcAft>
-                <a:spcPts val="600"/>
-              </a:spcAft>
-            </a:pPr>
-            <a:r>
-              <a:rPr sz="1500">
-                <a:solidFill>
-                  <a:srgbClr val="22282E"/>
-                </a:solidFill>
-              </a:rPr>
-              <a:t>•  El pipeline no filtra como esperas — Estás tratando objetos como texto. Usa Get-Member para ver propiedades reales y Where-Object.</a:t>
-            </a:r>
-          </a:p>
-          <a:p>
-            <a:pPr>
-              <a:spcAft>
-                <a:spcPts val="600"/>
-              </a:spcAft>
-            </a:pPr>
-            <a:r>
-              <a:rPr sz="1500">
-                <a:solidFill>
-                  <a:srgbClr val="22282E"/>
-                </a:solidFill>
-              </a:rPr>
-              <a:t>•  No aparecen eventos 4104 — Script Block Logging no habilitado. Actívalo por directiva y reintenta.</a:t>
-            </a:r>
-          </a:p>
-          <a:p>
-            <a:pPr>
-              <a:spcAft>
-                <a:spcPts val="600"/>
-              </a:spcAft>
-            </a:pPr>
-            <a:r>
-              <a:rPr sz="1500">
-                <a:solidFill>
-                  <a:srgbClr val="22282E"/>
-                </a:solidFill>
-              </a:rPr>
-              <a:t>•  Get-WinEvent lento o sin resultados — Filtro incorrecto. Usa -FilterHashtable en vez de filtrar tras traer todo.</a:t>
-            </a:r>
-          </a:p>
-          <a:p>
-            <a:pPr>
-              <a:spcAft>
-                <a:spcPts val="600"/>
-              </a:spcAft>
-            </a:pPr>
-            <a:r>
-              <a:rPr sz="1500">
-                <a:solidFill>
-                  <a:srgbClr val="22282E"/>
-                </a:solidFill>
-              </a:rPr>
-              <a:t>•  El script funciona en ISE pero no en consola — Diferencias de contexto/perfil. Prueba siempre en la consola destino.</a:t>
+              <a:t>•  Escribe un one-liner que liste los 10 procesos con más memoria (WorkingSet) ordenados de mayor a menor.</a:t>
+            </a:r>
+          </a:p>
+          <a:p>
+            <a:pPr>
+              <a:spcAft>
+                <a:spcPts val="600"/>
+              </a:spcAft>
+            </a:pPr>
+            <a:r>
+              <a:rPr sz="1500">
+                <a:solidFill>
+                  <a:srgbClr val="22282E"/>
+                </a:solidFill>
+              </a:rPr>
+              <a:t>•  Exporta a CSV todos los servicios con inicio automático que están detenidos.</a:t>
+            </a:r>
+          </a:p>
+          <a:p>
+            <a:pPr>
+              <a:spcAft>
+                <a:spcPts val="600"/>
+              </a:spcAft>
+            </a:pPr>
+            <a:r>
+              <a:rPr sz="1500">
+                <a:solidFill>
+                  <a:srgbClr val="22282E"/>
+                </a:solidFill>
+              </a:rPr>
+              <a:t>•  Explica con un ejemplo por qué Get-ExecutionPolicy no protege realmente contra scripts maliciosos.</a:t>
+            </a:r>
+          </a:p>
+          <a:p>
+            <a:pPr>
+              <a:spcAft>
+                <a:spcPts val="600"/>
+              </a:spcAft>
+            </a:pPr>
+            <a:r>
+              <a:rPr sz="1500">
+                <a:solidFill>
+                  <a:srgbClr val="22282E"/>
+                </a:solidFill>
+              </a:rPr>
+              <a:t>•  Investiga qué es un LOLBin y da dos ejemplos usados a través de PowerShell, citando el proyecto LOLBAS.</a:t>
+            </a:r>
+          </a:p>
+          <a:p>
+            <a:pPr>
+              <a:spcAft>
+                <a:spcPts val="600"/>
+              </a:spcAft>
+            </a:pPr>
+            <a:r>
+              <a:rPr sz="1500">
+                <a:solidFill>
+                  <a:srgbClr val="22282E"/>
+                </a:solidFill>
+              </a:rPr>
+              <a:t>•  Configura y verifica la transcripción de PowerShell (PowerShell Transcription) y localiza el archivo que genera.</a:t>
+            </a:r>
+          </a:p>
+          <a:p>
+            <a:pPr>
+              <a:spcAft>
+                <a:spcPts val="600"/>
+              </a:spcAft>
+            </a:pPr>
+            <a:r>
+              <a:rPr sz="1500">
+                <a:solidFill>
+                  <a:srgbClr val="22282E"/>
+                </a:solidFill>
+              </a:rPr>
+              <a:t>•  Detecta con Get-WinEvent cualquier evento 4104 cuyo contenido incluya la palabra Invoke-Expression.</a:t>
+            </a:r>
+          </a:p>
+          <a:p>
+            <a:pPr>
+              <a:spcAft>
+                <a:spcPts val="600"/>
+              </a:spcAft>
+            </a:pPr>
+            <a:r>
+              <a:rPr sz="1500">
+                <a:solidFill>
+                  <a:srgbClr val="22282E"/>
+                </a:solidFill>
+              </a:rPr>
+              <a:t>•  Usa Get-Member sobre la salida de Get-Service y enumera tres propiedades que no imprime la vista por defecto.</a:t>
             </a:r>
           </a:p>
         </p:txBody>
@@ -3347,7 +3381,7 @@
                   <a:srgbClr val="0B3D2E"/>
                 </a:solidFill>
               </a:rPr>
-              <a:t>❓ Preguntas frecuentes</a:t>
+              <a:t>📝 Reto verificable</a:t>
             </a:r>
           </a:p>
         </p:txBody>
@@ -3385,52 +3419,22 @@
                   <a:srgbClr val="22282E"/>
                 </a:solidFill>
               </a:rPr>
-              <a:t>•  ❓ ¿Por qué a los atacantes les gusta PowerShell? Está preinstalado, firmado por Microsoft, accede a .NET/WMI/APIs y puede ejecutar código en memoria sin tocar disco. Es living off the land por excelencia.</a:t>
-            </a:r>
-          </a:p>
-          <a:p>
-            <a:pPr>
-              <a:spcAft>
-                <a:spcPts val="600"/>
-              </a:spcAft>
-            </a:pPr>
-            <a:r>
-              <a:rPr sz="1500">
-                <a:solidFill>
-                  <a:srgbClr val="22282E"/>
-                </a:solidFill>
-              </a:rPr>
-              <a:t>•  ❓ ¿Execution Policy protege mi equipo? No de un atacante decidido: se puede evadir con un parámetro. Es una salvaguarda contra ejecución accidental, no un control de seguridad.</a:t>
-            </a:r>
-          </a:p>
-          <a:p>
-            <a:pPr>
-              <a:spcAft>
-                <a:spcPts val="600"/>
-              </a:spcAft>
-            </a:pPr>
-            <a:r>
-              <a:rPr sz="1500">
-                <a:solidFill>
-                  <a:srgbClr val="22282E"/>
-                </a:solidFill>
-              </a:rPr>
-              <a:t>•  ❓ ¿Qué versión de PowerShell debo aprender? Los conceptos son iguales en Windows PowerShell 5.1 y en PowerShell 7+. Para defensa, 5.1 sigue siendo omnipresente en equipos corporativos.</a:t>
-            </a:r>
-          </a:p>
-          <a:p>
-            <a:pPr>
-              <a:spcAft>
-                <a:spcPts val="600"/>
-              </a:spcAft>
-            </a:pPr>
-            <a:r>
-              <a:rPr sz="1500">
-                <a:solidFill>
-                  <a:srgbClr val="22282E"/>
-                </a:solidFill>
-              </a:rPr>
-              <a:t>•  ❓ ¿AMSI detiene todo? No, hay técnicas de evasión, pero combinado con Script Block Logging y Constrained Language Mode eleva mucho la barrera para el atacante.</a:t>
+              <a:t>•  Construye triage.ps1, un script de recolección para respuesta a incidentes que genere un informe (CSV o JSON) con: procesos y sus rutas, servicios en ejecución, conexiones de red en escucha, usuarios…</a:t>
+            </a:r>
+          </a:p>
+          <a:p>
+            <a:pPr>
+              <a:spcAft>
+                <a:spcPts val="600"/>
+              </a:spcAft>
+            </a:pPr>
+            <a:r>
+              <a:rPr sz="1500">
+                <a:solidFill>
+                  <a:srgbClr val="22282E"/>
+                </a:solidFill>
+              </a:rPr>
+              <a:t>•  Criterio de aceptación: el script produce un informe estructurado sin errores en la VM, y en el registro Microsoft-Windows-PowerShell/Operational aparece un evento 4104 correspondiente a su…</a:t>
             </a:r>
           </a:p>
         </p:txBody>
@@ -3481,7 +3485,7 @@
                   <a:srgbClr val="0B3D2E"/>
                 </a:solidFill>
               </a:rPr>
-              <a:t>🔗 Referencias</a:t>
+              <a:t>⚠️ Errores comunes</a:t>
             </a:r>
           </a:p>
         </p:txBody>
@@ -3519,6 +3523,304 @@
                   <a:srgbClr val="22282E"/>
                 </a:solidFill>
               </a:rPr>
+              <a:t>•  "running scripts is disabled on this system" — Execution Policy en Restricted. Ajústala con Set-ExecutionPolicy (con permiso) o lanza con -File y política adecuada.</a:t>
+            </a:r>
+          </a:p>
+          <a:p>
+            <a:pPr>
+              <a:spcAft>
+                <a:spcPts val="600"/>
+              </a:spcAft>
+            </a:pPr>
+            <a:r>
+              <a:rPr sz="1500">
+                <a:solidFill>
+                  <a:srgbClr val="22282E"/>
+                </a:solidFill>
+              </a:rPr>
+              <a:t>•  El pipeline no filtra como esperas — Tratas los objetos como texto. Usa Get-Member para ver las propiedades reales y filtra con Where-Object por su nombre.</a:t>
+            </a:r>
+          </a:p>
+          <a:p>
+            <a:pPr>
+              <a:spcAft>
+                <a:spcPts val="600"/>
+              </a:spcAft>
+            </a:pPr>
+            <a:r>
+              <a:rPr sz="1500">
+                <a:solidFill>
+                  <a:srgbClr val="22282E"/>
+                </a:solidFill>
+              </a:rPr>
+              <a:t>•  No aparecen eventos 4104 — Script Block Logging no está habilitado. Actívalo por directiva local y reintenta.</a:t>
+            </a:r>
+          </a:p>
+          <a:p>
+            <a:pPr>
+              <a:spcAft>
+                <a:spcPts val="600"/>
+              </a:spcAft>
+            </a:pPr>
+            <a:r>
+              <a:rPr sz="1500">
+                <a:solidFill>
+                  <a:srgbClr val="22282E"/>
+                </a:solidFill>
+              </a:rPr>
+              <a:t>•  Get-WinEvent lento o sin resultados — Filtras tras traer todo. Usa -FilterHashtable para filtrar en el origen.</a:t>
+            </a:r>
+          </a:p>
+          <a:p>
+            <a:pPr>
+              <a:spcAft>
+                <a:spcPts val="600"/>
+              </a:spcAft>
+            </a:pPr>
+            <a:r>
+              <a:rPr sz="1500">
+                <a:solidFill>
+                  <a:srgbClr val="22282E"/>
+                </a:solidFill>
+              </a:rPr>
+              <a:t>•  El script funciona en ISE pero no en consola — Diferencias de contexto, perfil o edición. Prueba siempre en la consola de destino.</a:t>
+            </a:r>
+          </a:p>
+          <a:p>
+            <a:pPr>
+              <a:spcAft>
+                <a:spcPts val="600"/>
+              </a:spcAft>
+            </a:pPr>
+            <a:r>
+              <a:rPr sz="1500">
+                <a:solidFill>
+                  <a:srgbClr val="22282E"/>
+                </a:solidFill>
+              </a:rPr>
+              <a:t>•  Confundes 5.1 con 7 y falta un cmdlet — Algunos cmdlets difieren entre ediciones. Comprueba la versión con $PSVersionTable.</a:t>
+            </a:r>
+          </a:p>
+        </p:txBody>
+      </p:sp>
+    </p:spTree>
+  </p:cSld>
+  <p:clrMapOvr>
+    <a:masterClrMapping/>
+  </p:clrMapOvr>
+</p:sld>
+</file>
+
+<file path=ppt/slides/slide13.xml><?xml version="1.0" encoding="utf-8"?>
+<p:sld xmlns:a="http://schemas.openxmlformats.org/drawingml/2006/main" xmlns:p="http://schemas.openxmlformats.org/presentationml/2006/main" xmlns:r="http://schemas.openxmlformats.org/officeDocument/2006/relationships">
+  <p:cSld>
+    <p:spTree>
+      <p:nvGrpSpPr>
+        <p:cNvPr id="1" name=""/>
+        <p:cNvGrpSpPr/>
+        <p:nvPr/>
+      </p:nvGrpSpPr>
+      <p:grpSpPr/>
+      <p:sp>
+        <p:nvSpPr>
+          <p:cNvPr id="2" name="TextBox 1"/>
+          <p:cNvSpPr txBox="1"/>
+          <p:nvPr/>
+        </p:nvSpPr>
+        <p:spPr>
+          <a:xfrm>
+            <a:off x="457200" y="320040"/>
+            <a:ext cx="8229600" cy="822960"/>
+          </a:xfrm>
+          <a:prstGeom prst="rect">
+            <a:avLst/>
+          </a:prstGeom>
+          <a:noFill/>
+        </p:spPr>
+        <p:txBody>
+          <a:bodyPr wrap="square">
+            <a:spAutoFit/>
+          </a:bodyPr>
+          <a:lstStyle/>
+          <a:p>
+            <a:r>
+              <a:rPr sz="2600" b="1">
+                <a:solidFill>
+                  <a:srgbClr val="0B3D2E"/>
+                </a:solidFill>
+              </a:rPr>
+              <a:t>❓ Preguntas frecuentes</a:t>
+            </a:r>
+          </a:p>
+        </p:txBody>
+      </p:sp>
+      <p:sp>
+        <p:nvSpPr>
+          <p:cNvPr id="3" name="TextBox 2"/>
+          <p:cNvSpPr txBox="1"/>
+          <p:nvPr/>
+        </p:nvSpPr>
+        <p:spPr>
+          <a:xfrm>
+            <a:off x="457200" y="1280160"/>
+            <a:ext cx="8229600" cy="4937760"/>
+          </a:xfrm>
+          <a:prstGeom prst="rect">
+            <a:avLst/>
+          </a:prstGeom>
+          <a:noFill/>
+        </p:spPr>
+        <p:txBody>
+          <a:bodyPr wrap="square">
+            <a:spAutoFit/>
+          </a:bodyPr>
+          <a:lstStyle/>
+          <a:p>
+            <a:pPr>
+              <a:spcAft>
+                <a:spcPts val="600"/>
+              </a:spcAft>
+            </a:pPr>
+            <a:r>
+              <a:rPr sz="1500">
+                <a:solidFill>
+                  <a:srgbClr val="22282E"/>
+                </a:solidFill>
+              </a:rPr>
+              <a:t>•  ❓ ¿Por qué a los atacantes les gusta PowerShell? Porque está preinstalado, firmado por Microsoft, accede a .NET, WMI y las APIs de Windows, y puede ejecutar código directamente en memoria sin tocar…</a:t>
+            </a:r>
+          </a:p>
+          <a:p>
+            <a:pPr>
+              <a:spcAft>
+                <a:spcPts val="600"/>
+              </a:spcAft>
+            </a:pPr>
+            <a:r>
+              <a:rPr sz="1500">
+                <a:solidFill>
+                  <a:srgbClr val="22282E"/>
+                </a:solidFill>
+              </a:rPr>
+              <a:t>•  ❓ ¿La Execution Policy protege mi equipo? No frente a un atacante decidido: se evade con un simple parámetro -ExecutionPolicy Bypass sin necesitar privilegios. Es una salvaguarda contra la ejecución…</a:t>
+            </a:r>
+          </a:p>
+          <a:p>
+            <a:pPr>
+              <a:spcAft>
+                <a:spcPts val="600"/>
+              </a:spcAft>
+            </a:pPr>
+            <a:r>
+              <a:rPr sz="1500">
+                <a:solidFill>
+                  <a:srgbClr val="22282E"/>
+                </a:solidFill>
+              </a:rPr>
+              <a:t>•  ❓ ¿Qué versión de PowerShell debo aprender? Los conceptos son iguales en Windows PowerShell 5.1 y en PowerShell 7+. Para defensa, la 5.1 sigue siendo omnipresente en equipos corporativos, así que es…</a:t>
+            </a:r>
+          </a:p>
+          <a:p>
+            <a:pPr>
+              <a:spcAft>
+                <a:spcPts val="600"/>
+              </a:spcAft>
+            </a:pPr>
+            <a:r>
+              <a:rPr sz="1500">
+                <a:solidFill>
+                  <a:srgbClr val="22282E"/>
+                </a:solidFill>
+              </a:rPr>
+              <a:t>•  ❓ ¿AMSI lo detiene todo? No; existen técnicas de evasión de AMSI. Pero combinada con Script Block Logging (que registra el evento 4104 aun tras la desofuscación) y Constrained Language Mode, eleva…</a:t>
+            </a:r>
+          </a:p>
+        </p:txBody>
+      </p:sp>
+    </p:spTree>
+  </p:cSld>
+  <p:clrMapOvr>
+    <a:masterClrMapping/>
+  </p:clrMapOvr>
+</p:sld>
+</file>
+
+<file path=ppt/slides/slide14.xml><?xml version="1.0" encoding="utf-8"?>
+<p:sld xmlns:a="http://schemas.openxmlformats.org/drawingml/2006/main" xmlns:p="http://schemas.openxmlformats.org/presentationml/2006/main" xmlns:r="http://schemas.openxmlformats.org/officeDocument/2006/relationships">
+  <p:cSld>
+    <p:spTree>
+      <p:nvGrpSpPr>
+        <p:cNvPr id="1" name=""/>
+        <p:cNvGrpSpPr/>
+        <p:nvPr/>
+      </p:nvGrpSpPr>
+      <p:grpSpPr/>
+      <p:sp>
+        <p:nvSpPr>
+          <p:cNvPr id="2" name="TextBox 1"/>
+          <p:cNvSpPr txBox="1"/>
+          <p:nvPr/>
+        </p:nvSpPr>
+        <p:spPr>
+          <a:xfrm>
+            <a:off x="457200" y="320040"/>
+            <a:ext cx="8229600" cy="822960"/>
+          </a:xfrm>
+          <a:prstGeom prst="rect">
+            <a:avLst/>
+          </a:prstGeom>
+          <a:noFill/>
+        </p:spPr>
+        <p:txBody>
+          <a:bodyPr wrap="square">
+            <a:spAutoFit/>
+          </a:bodyPr>
+          <a:lstStyle/>
+          <a:p>
+            <a:r>
+              <a:rPr sz="2600" b="1">
+                <a:solidFill>
+                  <a:srgbClr val="0B3D2E"/>
+                </a:solidFill>
+              </a:rPr>
+              <a:t>🔗 Referencias</a:t>
+            </a:r>
+          </a:p>
+        </p:txBody>
+      </p:sp>
+      <p:sp>
+        <p:nvSpPr>
+          <p:cNvPr id="3" name="TextBox 2"/>
+          <p:cNvSpPr txBox="1"/>
+          <p:nvPr/>
+        </p:nvSpPr>
+        <p:spPr>
+          <a:xfrm>
+            <a:off x="457200" y="1280160"/>
+            <a:ext cx="8229600" cy="4937760"/>
+          </a:xfrm>
+          <a:prstGeom prst="rect">
+            <a:avLst/>
+          </a:prstGeom>
+          <a:noFill/>
+        </p:spPr>
+        <p:txBody>
+          <a:bodyPr wrap="square">
+            <a:spAutoFit/>
+          </a:bodyPr>
+          <a:lstStyle/>
+          <a:p>
+            <a:pPr>
+              <a:spcAft>
+                <a:spcPts val="600"/>
+              </a:spcAft>
+            </a:pPr>
+            <a:r>
+              <a:rPr sz="1500">
+                <a:solidFill>
+                  <a:srgbClr val="22282E"/>
+                </a:solidFill>
+              </a:rPr>
               <a:t>•  Microsoft PowerShell Documentation — &lt;https://learn.microsoft.com/powershell/&gt;</a:t>
             </a:r>
           </a:p>
@@ -3567,8 +3869,173 @@
               <a:t>•  LOLBAS Project — &lt;https://lolbas-project.github.io/&gt;</a:t>
             </a:r>
           </a:p>
-        </p:txBody>
-      </p:sp>
+          <a:p>
+            <a:pPr>
+              <a:spcAft>
+                <a:spcPts val="600"/>
+              </a:spcAft>
+            </a:pPr>
+            <a:r>
+              <a:rPr sz="1500">
+                <a:solidFill>
+                  <a:srgbClr val="22282E"/>
+                </a:solidFill>
+              </a:rPr>
+              <a:t>•  MITRE ATT&amp;CK, técnica T1059.001 (PowerShell) — &lt;https://attack.mitre.org/techniques/T1059/001/&gt;</a:t>
+            </a:r>
+          </a:p>
+        </p:txBody>
+      </p:sp>
+    </p:spTree>
+  </p:cSld>
+  <p:clrMapOvr>
+    <a:masterClrMapping/>
+  </p:clrMapOvr>
+</p:sld>
+</file>
+
+<file path=ppt/slides/slide15.xml><?xml version="1.0" encoding="utf-8"?>
+<p:sld xmlns:a="http://schemas.openxmlformats.org/drawingml/2006/main" xmlns:p="http://schemas.openxmlformats.org/presentationml/2006/main" xmlns:r="http://schemas.openxmlformats.org/officeDocument/2006/relationships">
+  <p:cSld>
+    <p:spTree>
+      <p:nvGrpSpPr>
+        <p:cNvPr id="1" name=""/>
+        <p:cNvGrpSpPr/>
+        <p:nvPr/>
+      </p:nvGrpSpPr>
+      <p:grpSpPr/>
+      <p:sp>
+        <p:nvSpPr>
+          <p:cNvPr id="2" name="TextBox 1"/>
+          <p:cNvSpPr txBox="1"/>
+          <p:nvPr/>
+        </p:nvSpPr>
+        <p:spPr>
+          <a:xfrm>
+            <a:off x="457200" y="274320"/>
+            <a:ext cx="8229600" cy="640080"/>
+          </a:xfrm>
+          <a:prstGeom prst="rect">
+            <a:avLst/>
+          </a:prstGeom>
+          <a:noFill/>
+        </p:spPr>
+        <p:txBody>
+          <a:bodyPr wrap="square">
+            <a:spAutoFit/>
+          </a:bodyPr>
+          <a:lstStyle/>
+          <a:p>
+            <a:r>
+              <a:rPr sz="2200" b="1">
+                <a:solidFill>
+                  <a:srgbClr val="0B3D2E"/>
+                </a:solidFill>
+              </a:rPr>
+              <a:t>Diagrama 1</a:t>
+            </a:r>
+          </a:p>
+        </p:txBody>
+      </p:sp>
+      <p:pic>
+        <p:nvPicPr>
+          <p:cNvPr id="3" name="Picture 2" descr="4096a9618d6246c9.png"/>
+          <p:cNvPicPr>
+            <a:picLocks noChangeAspect="1"/>
+          </p:cNvPicPr>
+          <p:nvPr/>
+        </p:nvPicPr>
+        <p:blipFill>
+          <a:blip r:embed="rId2"/>
+          <a:stretch>
+            <a:fillRect/>
+          </a:stretch>
+        </p:blipFill>
+        <p:spPr>
+          <a:xfrm>
+            <a:off x="457200" y="3511296"/>
+            <a:ext cx="8229600" cy="475488"/>
+          </a:xfrm>
+          <a:prstGeom prst="rect">
+            <a:avLst/>
+          </a:prstGeom>
+        </p:spPr>
+      </p:pic>
+    </p:spTree>
+  </p:cSld>
+  <p:clrMapOvr>
+    <a:masterClrMapping/>
+  </p:clrMapOvr>
+</p:sld>
+</file>
+
+<file path=ppt/slides/slide16.xml><?xml version="1.0" encoding="utf-8"?>
+<p:sld xmlns:a="http://schemas.openxmlformats.org/drawingml/2006/main" xmlns:p="http://schemas.openxmlformats.org/presentationml/2006/main" xmlns:r="http://schemas.openxmlformats.org/officeDocument/2006/relationships">
+  <p:cSld>
+    <p:spTree>
+      <p:nvGrpSpPr>
+        <p:cNvPr id="1" name=""/>
+        <p:cNvGrpSpPr/>
+        <p:nvPr/>
+      </p:nvGrpSpPr>
+      <p:grpSpPr/>
+      <p:sp>
+        <p:nvSpPr>
+          <p:cNvPr id="2" name="TextBox 1"/>
+          <p:cNvSpPr txBox="1"/>
+          <p:nvPr/>
+        </p:nvSpPr>
+        <p:spPr>
+          <a:xfrm>
+            <a:off x="457200" y="274320"/>
+            <a:ext cx="8229600" cy="640080"/>
+          </a:xfrm>
+          <a:prstGeom prst="rect">
+            <a:avLst/>
+          </a:prstGeom>
+          <a:noFill/>
+        </p:spPr>
+        <p:txBody>
+          <a:bodyPr wrap="square">
+            <a:spAutoFit/>
+          </a:bodyPr>
+          <a:lstStyle/>
+          <a:p>
+            <a:r>
+              <a:rPr sz="2200" b="1">
+                <a:solidFill>
+                  <a:srgbClr val="0B3D2E"/>
+                </a:solidFill>
+              </a:rPr>
+              <a:t>Diagrama 2</a:t>
+            </a:r>
+          </a:p>
+        </p:txBody>
+      </p:sp>
+      <p:pic>
+        <p:nvPicPr>
+          <p:cNvPr id="3" name="Picture 2" descr="9ee2996430552dc5.png"/>
+          <p:cNvPicPr>
+            <a:picLocks noChangeAspect="1"/>
+          </p:cNvPicPr>
+          <p:nvPr/>
+        </p:nvPicPr>
+        <p:blipFill>
+          <a:blip r:embed="rId2"/>
+          <a:stretch>
+            <a:fillRect/>
+          </a:stretch>
+        </p:blipFill>
+        <p:spPr>
+          <a:xfrm>
+            <a:off x="1235915" y="1097280"/>
+            <a:ext cx="6672170" cy="5303520"/>
+          </a:xfrm>
+          <a:prstGeom prst="rect">
+            <a:avLst/>
+          </a:prstGeom>
+        </p:spPr>
+      </p:pic>
     </p:spTree>
   </p:cSld>
   <p:clrMapOvr>
@@ -3653,7 +4120,7 @@
                   <a:srgbClr val="22282E"/>
                 </a:solidFill>
               </a:rPr>
-              <a:t>•  Aprender PowerShell como herramienta dual: los atacantes lo usan para vivir de la tierra (living off the land) y los defensores para automatizar y responder. Al terminar sabrás manejar objetos, consultar el sistema, entender por qué PowerShell es tan potente para ataque y qué controles (logging, AMSI, políticas) lo vigilan.</a:t>
+              <a:t>•  Aprender PowerShell como la herramienta dual que es: los atacantes lo usan para "vivir de la tierra" (living off the land) porque está preinstalado y firmado por Microsoft, y los defensores lo usan…</a:t>
             </a:r>
           </a:p>
         </p:txBody>
@@ -3757,67 +4224,82 @@
                   <a:srgbClr val="22282E"/>
                 </a:solidFill>
               </a:rPr>
-              <a:t>•  Usar cmdlets, la tubería de objetos y el sistema de ayuda.</a:t>
-            </a:r>
-          </a:p>
-          <a:p>
-            <a:pPr>
-              <a:spcAft>
-                <a:spcPts val="600"/>
-              </a:spcAft>
-            </a:pPr>
-            <a:r>
-              <a:rPr sz="1500">
-                <a:solidFill>
-                  <a:srgbClr val="22282E"/>
-                </a:solidFill>
-              </a:rPr>
-              <a:t>•  Consultar procesos, servicios, red y eventos con PowerShell.</a:t>
-            </a:r>
-          </a:p>
-          <a:p>
-            <a:pPr>
-              <a:spcAft>
-                <a:spcPts val="600"/>
-              </a:spcAft>
-            </a:pPr>
-            <a:r>
-              <a:rPr sz="1500">
-                <a:solidFill>
-                  <a:srgbClr val="22282E"/>
-                </a:solidFill>
-              </a:rPr>
-              <a:t>•  Explicar por qué PowerShell es un vector ofensivo frecuente.</a:t>
-            </a:r>
-          </a:p>
-          <a:p>
-            <a:pPr>
-              <a:spcAft>
-                <a:spcPts val="600"/>
-              </a:spcAft>
-            </a:pPr>
-            <a:r>
-              <a:rPr sz="1500">
-                <a:solidFill>
-                  <a:srgbClr val="22282E"/>
-                </a:solidFill>
-              </a:rPr>
-              <a:t>•  Configurar defensas: logging de scripts, políticas de ejecución, AMSI.</a:t>
-            </a:r>
-          </a:p>
-          <a:p>
-            <a:pPr>
-              <a:spcAft>
-                <a:spcPts val="600"/>
-              </a:spcAft>
-            </a:pPr>
-            <a:r>
-              <a:rPr sz="1500">
-                <a:solidFill>
-                  <a:srgbClr val="22282E"/>
-                </a:solidFill>
-              </a:rPr>
-              <a:t>•  Escribir un script de recolección para respuesta a incidentes.</a:t>
+              <a:t>•  Usar cmdlets, la tubería de objetos y el sistema de ayuda autodescubrible.</a:t>
+            </a:r>
+          </a:p>
+          <a:p>
+            <a:pPr>
+              <a:spcAft>
+                <a:spcPts val="600"/>
+              </a:spcAft>
+            </a:pPr>
+            <a:r>
+              <a:rPr sz="1500">
+                <a:solidFill>
+                  <a:srgbClr val="22282E"/>
+                </a:solidFill>
+              </a:rPr>
+              <a:t>•  Consultar procesos, servicios, conexiones de red y eventos con PowerShell.</a:t>
+            </a:r>
+          </a:p>
+          <a:p>
+            <a:pPr>
+              <a:spcAft>
+                <a:spcPts val="600"/>
+              </a:spcAft>
+            </a:pPr>
+            <a:r>
+              <a:rPr sz="1500">
+                <a:solidFill>
+                  <a:srgbClr val="22282E"/>
+                </a:solidFill>
+              </a:rPr>
+              <a:t>•  Explicar por qué PowerShell es un vector ofensivo frecuente y qué es un LOLBin.</a:t>
+            </a:r>
+          </a:p>
+          <a:p>
+            <a:pPr>
+              <a:spcAft>
+                <a:spcPts val="600"/>
+              </a:spcAft>
+            </a:pPr>
+            <a:r>
+              <a:rPr sz="1500">
+                <a:solidFill>
+                  <a:srgbClr val="22282E"/>
+                </a:solidFill>
+              </a:rPr>
+              <a:t>•  Configurar defensas: Script Block Logging, transcripción, Execution Policy y AMSI.</a:t>
+            </a:r>
+          </a:p>
+          <a:p>
+            <a:pPr>
+              <a:spcAft>
+                <a:spcPts val="600"/>
+              </a:spcAft>
+            </a:pPr>
+            <a:r>
+              <a:rPr sz="1500">
+                <a:solidFill>
+                  <a:srgbClr val="22282E"/>
+                </a:solidFill>
+              </a:rPr>
+              <a:t>•  Escribir un script de recolección para respuesta a incidentes que exporte un informe.</a:t>
+            </a:r>
+          </a:p>
+          <a:p>
+            <a:pPr>
+              <a:spcAft>
+                <a:spcPts val="600"/>
+              </a:spcAft>
+            </a:pPr>
+            <a:r>
+              <a:rPr sz="1500">
+                <a:solidFill>
+                  <a:srgbClr val="22282E"/>
+                </a:solidFill>
+              </a:rPr>
+              <a:t>•  Verificar que la ejecución de un script queda registrada en el evento 4104.</a:t>
             </a:r>
           </a:p>
         </p:txBody>
@@ -3906,7 +4388,7 @@
                   <a:srgbClr val="22282E"/>
                 </a:solidFill>
               </a:rPr>
-              <a:t>•  1 — Cmdlets y verbo-nombre</a:t>
+              <a:t>•  1 — Cmdlets y Verbo-Nombre</a:t>
             </a:r>
           </a:p>
           <a:p>
@@ -3936,7 +4418,7 @@
                   <a:srgbClr val="22282E"/>
                 </a:solidFill>
               </a:rPr>
-              <a:t>•  3 — Get-Help/Get-Member</a:t>
+              <a:t>•  3 — Get-Help / Get-Member</a:t>
             </a:r>
           </a:p>
           <a:p>
@@ -4047,7 +4529,7 @@
                   <a:srgbClr val="0B3D2E"/>
                 </a:solidFill>
               </a:rPr>
-              <a:t>📖 Definiciones y características</a:t>
+              <a:t>🧠 Explicación en profundidad</a:t>
             </a:r>
           </a:p>
         </p:txBody>
@@ -4085,82 +4567,82 @@
                   <a:srgbClr val="22282E"/>
                 </a:solidFill>
               </a:rPr>
-              <a:t>•  Cmdlet: comando nativo con forma Verbo-Nombre (Get-Process). Clave: devuelve objetos .NET, no texto.</a:t>
-            </a:r>
-          </a:p>
-          <a:p>
-            <a:pPr>
-              <a:spcAft>
-                <a:spcPts val="600"/>
-              </a:spcAft>
-            </a:pPr>
-            <a:r>
-              <a:rPr sz="1500">
-                <a:solidFill>
-                  <a:srgbClr val="22282E"/>
-                </a:solidFill>
-              </a:rPr>
-              <a:t>•  Pipeline de objetos: encadena cmdlets pasando objetos con propiedades. Clave: Where-Object, Select-Object, Sort-Object.</a:t>
-            </a:r>
-          </a:p>
-          <a:p>
-            <a:pPr>
-              <a:spcAft>
-                <a:spcPts val="600"/>
-              </a:spcAft>
-            </a:pPr>
-            <a:r>
-              <a:rPr sz="1500">
-                <a:solidFill>
-                  <a:srgbClr val="22282E"/>
-                </a:solidFill>
-              </a:rPr>
-              <a:t>•  Execution Policy: ajuste que controla qué scripts se ejecutan. Clave: no es una barrera de seguridad; se evita fácilmente.</a:t>
-            </a:r>
-          </a:p>
-          <a:p>
-            <a:pPr>
-              <a:spcAft>
-                <a:spcPts val="600"/>
-              </a:spcAft>
-            </a:pPr>
-            <a:r>
-              <a:rPr sz="1500">
-                <a:solidFill>
-                  <a:srgbClr val="22282E"/>
-                </a:solidFill>
-              </a:rPr>
-              <a:t>•  AMSI (Antimalware Scan Interface): interfaz que permite al antivirus inspeccionar scripts en memoria. Clave: los atacantes intentan evadirla.</a:t>
-            </a:r>
-          </a:p>
-          <a:p>
-            <a:pPr>
-              <a:spcAft>
-                <a:spcPts val="600"/>
-              </a:spcAft>
-            </a:pPr>
-            <a:r>
-              <a:rPr sz="1500">
-                <a:solidFill>
-                  <a:srgbClr val="22282E"/>
-                </a:solidFill>
-              </a:rPr>
-              <a:t>•  Script Block Logging: registro del contenido de los bloques ejecutados (evento 4104). Clave: pilar de la detección de abuso de PowerShell.</a:t>
-            </a:r>
-          </a:p>
-          <a:p>
-            <a:pPr>
-              <a:spcAft>
-                <a:spcPts val="600"/>
-              </a:spcAft>
-            </a:pPr>
-            <a:r>
-              <a:rPr sz="1500">
-                <a:solidFill>
-                  <a:srgbClr val="22282E"/>
-                </a:solidFill>
-              </a:rPr>
-              <a:t>•  Constrained Language Mode: modo que limita el acceso a APIs peligrosas. Clave: reduce la capacidad ofensiva de PowerShell.</a:t>
+              <a:t>•  PowerShell no es una shell de texto como Bash, sino un motor de automatización construido sobre .NET. Su unidad básica es el cmdlet, un pequeño comando con la forma Verbo-Nombre: Get-Process…</a:t>
+            </a:r>
+          </a:p>
+          <a:p>
+            <a:pPr>
+              <a:spcAft>
+                <a:spcPts val="600"/>
+              </a:spcAft>
+            </a:pPr>
+            <a:r>
+              <a:rPr sz="1500">
+                <a:solidFill>
+                  <a:srgbClr val="22282E"/>
+                </a:solidFill>
+              </a:rPr>
+              <a:t>•  Aquí está la idea que lo cambia todo. En Bash, por una tubería fluye texto, y para extraer un dato hay que recortarlo con awk o cut, lo que es frágil ante cambios de formato. En PowerShell, por la…</a:t>
+            </a:r>
+          </a:p>
+          <a:p>
+            <a:pPr>
+              <a:spcAft>
+                <a:spcPts val="600"/>
+              </a:spcAft>
+            </a:pPr>
+            <a:r>
+              <a:rPr sz="1500">
+                <a:solidFill>
+                  <a:srgbClr val="22282E"/>
+                </a:solidFill>
+              </a:rPr>
+              <a:t>•  La misma tubería de objetos convierte a PowerShell en una navaja suiza para el triaje. Get-Process con sus rutas revela binarios sospechosos; Get-Service | Where-Object Status -eq 'Running' enumera…</a:t>
+            </a:r>
+          </a:p>
+          <a:p>
+            <a:pPr>
+              <a:spcAft>
+                <a:spcPts val="600"/>
+              </a:spcAft>
+            </a:pPr>
+            <a:r>
+              <a:rPr sz="1500">
+                <a:solidFill>
+                  <a:srgbClr val="22282E"/>
+                </a:solidFill>
+              </a:rPr>
+              <a:t>•  PowerShell es el ejemplo canónico de living off the land: usar herramientas legítimas ya presentes en el sistema para no depositar malware que un antivirus detecte. Sus ventajas para el atacante son…</a:t>
+            </a:r>
+          </a:p>
+          <a:p>
+            <a:pPr>
+              <a:spcAft>
+                <a:spcPts val="600"/>
+              </a:spcAft>
+            </a:pPr>
+            <a:r>
+              <a:rPr sz="1500">
+                <a:solidFill>
+                  <a:srgbClr val="22282E"/>
+                </a:solidFill>
+              </a:rPr>
+              <a:t>•  Es un malentendido casi universal, así que conviene ser tajante: la Execution Policy no es un control de seguridad. Es una salvaguarda contra la ejecución accidental de scripts (por ejemplo, hacer…</a:t>
+            </a:r>
+          </a:p>
+          <a:p>
+            <a:pPr>
+              <a:spcAft>
+                <a:spcPts val="600"/>
+              </a:spcAft>
+            </a:pPr>
+            <a:r>
+              <a:rPr sz="1500">
+                <a:solidFill>
+                  <a:srgbClr val="22282E"/>
+                </a:solidFill>
+              </a:rPr>
+              <a:t>•  Las defensas reales operan en tres frentes complementarios. El Script Block Logging registra el contenido completo de cada bloque de script que se ejecuta —incluso si estaba ofuscado o codificado…</a:t>
             </a:r>
           </a:p>
         </p:txBody>
@@ -4211,7 +4693,7 @@
                   <a:srgbClr val="0B3D2E"/>
                 </a:solidFill>
               </a:rPr>
-              <a:t>🧰 Herramientas y preparación</a:t>
+              <a:t>📖 Definiciones y características</a:t>
             </a:r>
           </a:p>
         </p:txBody>
@@ -4249,7 +4731,97 @@
                   <a:srgbClr val="22282E"/>
                 </a:solidFill>
               </a:rPr>
-              <a:t>•  Trabaja en tu VM Windows de laboratorio. PowerShell viene integrado; usa la consola y el ISE o VS Code con la extensión de PowerShell. Para defensa, explora la Directiva de grupo local (gpedit.msc) y el Visor de eventos (Microsoft-Windows-PowerShell/Operational). No ejecutes cargas ofensivas contra sistemas ajenos.</a:t>
+              <a:t>•  Cmdlet: comando nativo con forma Verbo-Nombre (Get-Process). Devuelve objetos .NET, no texto, y los verbos estandarizados hacen el lenguaje descubrible. Es la unidad básica de automatización.</a:t>
+            </a:r>
+          </a:p>
+          <a:p>
+            <a:pPr>
+              <a:spcAft>
+                <a:spcPts val="600"/>
+              </a:spcAft>
+            </a:pPr>
+            <a:r>
+              <a:rPr sz="1500">
+                <a:solidFill>
+                  <a:srgbClr val="22282E"/>
+                </a:solidFill>
+              </a:rPr>
+              <a:t>•  Pipeline de objetos: encadena cmdlets pasando objetos con propiedades tipadas, no texto. Where-Object, Select-Object y Sort-Object operan por nombre de propiedad, lo que es más robusto que parsear…</a:t>
+            </a:r>
+          </a:p>
+          <a:p>
+            <a:pPr>
+              <a:spcAft>
+                <a:spcPts val="600"/>
+              </a:spcAft>
+            </a:pPr>
+            <a:r>
+              <a:rPr sz="1500">
+                <a:solidFill>
+                  <a:srgbClr val="22282E"/>
+                </a:solidFill>
+              </a:rPr>
+              <a:t>•  Get-Member: cmdlet que revela las propiedades y métodos reales de un objeto. Es la herramienta de diagnóstico número uno: cuando el pipeline no filtra bien, casi siempre es que tratas los objetos…</a:t>
+            </a:r>
+          </a:p>
+          <a:p>
+            <a:pPr>
+              <a:spcAft>
+                <a:spcPts val="600"/>
+              </a:spcAft>
+            </a:pPr>
+            <a:r>
+              <a:rPr sz="1500">
+                <a:solidFill>
+                  <a:srgbClr val="22282E"/>
+                </a:solidFill>
+              </a:rPr>
+              <a:t>•  Execution Policy: ajuste que controla qué scripts se ejecutan por defecto. No es una barrera de seguridad: se evade con -ExecutionPolicy Bypass sin privilegios. Solo previene la ejecución accidental.</a:t>
+            </a:r>
+          </a:p>
+          <a:p>
+            <a:pPr>
+              <a:spcAft>
+                <a:spcPts val="600"/>
+              </a:spcAft>
+            </a:pPr>
+            <a:r>
+              <a:rPr sz="1500">
+                <a:solidFill>
+                  <a:srgbClr val="22282E"/>
+                </a:solidFill>
+              </a:rPr>
+              <a:t>•  Living off the land (LotL): táctica de usar herramientas legítimas del sistema para no depositar malware detectable. PowerShell es su ejemplo canónico por estar preinstalado, firmado y con acceso a…</a:t>
+            </a:r>
+          </a:p>
+          <a:p>
+            <a:pPr>
+              <a:spcAft>
+                <a:spcPts val="600"/>
+              </a:spcAft>
+            </a:pPr>
+            <a:r>
+              <a:rPr sz="1500">
+                <a:solidFill>
+                  <a:srgbClr val="22282E"/>
+                </a:solidFill>
+              </a:rPr>
+              <a:t>•  LOLBin / LOLBAS: binario legítimo del sistema del que se abusa con fines maliciosos. El proyecto LOLBAS los cataloga. Reconocerlos es clave para la detección basada en comportamiento.</a:t>
+            </a:r>
+          </a:p>
+          <a:p>
+            <a:pPr>
+              <a:spcAft>
+                <a:spcPts val="600"/>
+              </a:spcAft>
+            </a:pPr>
+            <a:r>
+              <a:rPr sz="1500">
+                <a:solidFill>
+                  <a:srgbClr val="22282E"/>
+                </a:solidFill>
+              </a:rPr>
+              <a:t>•  AMSI (Antimalware Scan Interface): interfaz que entrega el contenido de un script al antivirus para inspeccionarlo en memoria antes de ejecutarlo, cerrando el hueco del código fileless. Los atacantes…</a:t>
             </a:r>
           </a:p>
         </p:txBody>
@@ -4300,7 +4872,7 @@
                   <a:srgbClr val="0B3D2E"/>
                 </a:solidFill>
               </a:rPr>
-              <a:t>🧪 Laboratorio guiado</a:t>
+              <a:t>📔 Glosario</a:t>
             </a:r>
           </a:p>
         </p:txBody>
@@ -4338,97 +4910,97 @@
                   <a:srgbClr val="22282E"/>
                 </a:solidFill>
               </a:rPr>
-              <a:t>•  Descubrir el entorno:</a:t>
-            </a:r>
-          </a:p>
-          <a:p>
-            <a:pPr>
-              <a:spcAft>
-                <a:spcPts val="600"/>
-              </a:spcAft>
-            </a:pPr>
-            <a:r>
-              <a:rPr sz="1500">
-                <a:solidFill>
-                  <a:srgbClr val="22282E"/>
-                </a:solidFill>
-              </a:rPr>
-              <a:t>•  Get-Command -Verb Get | Measure-Object</a:t>
-            </a:r>
-          </a:p>
-          <a:p>
-            <a:pPr>
-              <a:spcAft>
-                <a:spcPts val="600"/>
-              </a:spcAft>
-            </a:pPr>
-            <a:r>
-              <a:rPr sz="1500">
-                <a:solidFill>
-                  <a:srgbClr val="22282E"/>
-                </a:solidFill>
-              </a:rPr>
-              <a:t>•  Get-Help Get-Process -Examples</a:t>
-            </a:r>
-          </a:p>
-          <a:p>
-            <a:pPr>
-              <a:spcAft>
-                <a:spcPts val="600"/>
-              </a:spcAft>
-            </a:pPr>
-            <a:r>
-              <a:rPr sz="1500">
-                <a:solidFill>
-                  <a:srgbClr val="22282E"/>
-                </a:solidFill>
-              </a:rPr>
-              <a:t>•  Get-Process | Get-Member</a:t>
-            </a:r>
-          </a:p>
-          <a:p>
-            <a:pPr>
-              <a:spcAft>
-                <a:spcPts val="600"/>
-              </a:spcAft>
-            </a:pPr>
-            <a:r>
-              <a:rPr sz="1500">
-                <a:solidFill>
-                  <a:srgbClr val="22282E"/>
-                </a:solidFill>
-              </a:rPr>
-              <a:t>•  Consultas de sistema (uso defensivo/forense):</a:t>
-            </a:r>
-          </a:p>
-          <a:p>
-            <a:pPr>
-              <a:spcAft>
-                <a:spcPts val="600"/>
-              </a:spcAft>
-            </a:pPr>
-            <a:r>
-              <a:rPr sz="1500">
-                <a:solidFill>
-                  <a:srgbClr val="22282E"/>
-                </a:solidFill>
-              </a:rPr>
-              <a:t>•  Get-Process | Sort-Object CPU -Descending | Select-Object -First 5 Name,Id,CPU</a:t>
-            </a:r>
-          </a:p>
-          <a:p>
-            <a:pPr>
-              <a:spcAft>
-                <a:spcPts val="600"/>
-              </a:spcAft>
-            </a:pPr>
-            <a:r>
-              <a:rPr sz="1500">
-                <a:solidFill>
-                  <a:srgbClr val="22282E"/>
-                </a:solidFill>
-              </a:rPr>
-              <a:t>•  Get-Service | Where-Object Status -eq 'Running' | Select-Object Name,DisplayName</a:t>
+              <a:t>•  Término — Definición concisa</a:t>
+            </a:r>
+          </a:p>
+          <a:p>
+            <a:pPr>
+              <a:spcAft>
+                <a:spcPts val="600"/>
+              </a:spcAft>
+            </a:pPr>
+            <a:r>
+              <a:rPr sz="1500">
+                <a:solidFill>
+                  <a:srgbClr val="22282E"/>
+                </a:solidFill>
+              </a:rPr>
+              <a:t>•  Cmdlet — Comando Verbo-Nombre que devuelve objetos .NET</a:t>
+            </a:r>
+          </a:p>
+          <a:p>
+            <a:pPr>
+              <a:spcAft>
+                <a:spcPts val="600"/>
+              </a:spcAft>
+            </a:pPr>
+            <a:r>
+              <a:rPr sz="1500">
+                <a:solidFill>
+                  <a:srgbClr val="22282E"/>
+                </a:solidFill>
+              </a:rPr>
+              <a:t>•  Objeto — Dato tipado con propiedades y métodos que fluye por el pipeline</a:t>
+            </a:r>
+          </a:p>
+          <a:p>
+            <a:pPr>
+              <a:spcAft>
+                <a:spcPts val="600"/>
+              </a:spcAft>
+            </a:pPr>
+            <a:r>
+              <a:rPr sz="1500">
+                <a:solidFill>
+                  <a:srgbClr val="22282E"/>
+                </a:solidFill>
+              </a:rPr>
+              <a:t>•  Where-Object — Filtra objetos del pipeline por una condición</a:t>
+            </a:r>
+          </a:p>
+          <a:p>
+            <a:pPr>
+              <a:spcAft>
+                <a:spcPts val="600"/>
+              </a:spcAft>
+            </a:pPr>
+            <a:r>
+              <a:rPr sz="1500">
+                <a:solidFill>
+                  <a:srgbClr val="22282E"/>
+                </a:solidFill>
+              </a:rPr>
+              <a:t>•  Select-Object — Selecciona propiedades o un número de objetos</a:t>
+            </a:r>
+          </a:p>
+          <a:p>
+            <a:pPr>
+              <a:spcAft>
+                <a:spcPts val="600"/>
+              </a:spcAft>
+            </a:pPr>
+            <a:r>
+              <a:rPr sz="1500">
+                <a:solidFill>
+                  <a:srgbClr val="22282E"/>
+                </a:solidFill>
+              </a:rPr>
+              <a:t>•  Get-Member — Revela propiedades y métodos reales de un objeto</a:t>
+            </a:r>
+          </a:p>
+          <a:p>
+            <a:pPr>
+              <a:spcAft>
+                <a:spcPts val="600"/>
+              </a:spcAft>
+            </a:pPr>
+            <a:r>
+              <a:rPr sz="1500">
+                <a:solidFill>
+                  <a:srgbClr val="22282E"/>
+                </a:solidFill>
+              </a:rPr>
+              <a:t>•  LotL — Living off the land: abusar de herramientas legítimas</a:t>
             </a:r>
           </a:p>
         </p:txBody>
@@ -4479,7 +5051,7 @@
                   <a:srgbClr val="0B3D2E"/>
                 </a:solidFill>
               </a:rPr>
-              <a:t>✍️ Ejercicios</a:t>
+              <a:t>🧰 Herramientas y preparación</a:t>
             </a:r>
           </a:p>
         </p:txBody>
@@ -4517,82 +5089,7 @@
                   <a:srgbClr val="22282E"/>
                 </a:solidFill>
               </a:rPr>
-              <a:t>•  Escribe un one-liner que liste los 10 procesos con más memoria (WorkingSet) ordenados.</a:t>
-            </a:r>
-          </a:p>
-          <a:p>
-            <a:pPr>
-              <a:spcAft>
-                <a:spcPts val="600"/>
-              </a:spcAft>
-            </a:pPr>
-            <a:r>
-              <a:rPr sz="1500">
-                <a:solidFill>
-                  <a:srgbClr val="22282E"/>
-                </a:solidFill>
-              </a:rPr>
-              <a:t>•  Exporta a CSV todos los servicios con inicio automático que están detenidos.</a:t>
-            </a:r>
-          </a:p>
-          <a:p>
-            <a:pPr>
-              <a:spcAft>
-                <a:spcPts val="600"/>
-              </a:spcAft>
-            </a:pPr>
-            <a:r>
-              <a:rPr sz="1500">
-                <a:solidFill>
-                  <a:srgbClr val="22282E"/>
-                </a:solidFill>
-              </a:rPr>
-              <a:t>•  Explica por qué Get-ExecutionPolicy no protege realmente contra scripts maliciosos.</a:t>
-            </a:r>
-          </a:p>
-          <a:p>
-            <a:pPr>
-              <a:spcAft>
-                <a:spcPts val="600"/>
-              </a:spcAft>
-            </a:pPr>
-            <a:r>
-              <a:rPr sz="1500">
-                <a:solidFill>
-                  <a:srgbClr val="22282E"/>
-                </a:solidFill>
-              </a:rPr>
-              <a:t>•  Investiga qué es un LOLBin y da dos ejemplos usados vía PowerShell.</a:t>
-            </a:r>
-          </a:p>
-          <a:p>
-            <a:pPr>
-              <a:spcAft>
-                <a:spcPts val="600"/>
-              </a:spcAft>
-            </a:pPr>
-            <a:r>
-              <a:rPr sz="1500">
-                <a:solidFill>
-                  <a:srgbClr val="22282E"/>
-                </a:solidFill>
-              </a:rPr>
-              <a:t>•  Configura y verifica la transcripción de PowerShell (PowerShell Transcription).</a:t>
-            </a:r>
-          </a:p>
-          <a:p>
-            <a:pPr>
-              <a:spcAft>
-                <a:spcPts val="600"/>
-              </a:spcAft>
-            </a:pPr>
-            <a:r>
-              <a:rPr sz="1500">
-                <a:solidFill>
-                  <a:srgbClr val="22282E"/>
-                </a:solidFill>
-              </a:rPr>
-              <a:t>•  Detecta con Get-WinEvent cualquier evento 4104 que contenga la palabra Invoke-Expression.</a:t>
+              <a:t>•  Trabaja en tu VM Windows de laboratorio. PowerShell viene integrado; usa la consola y VS Code con la extensión de PowerShell (el clásico ISE sigue disponible pero está en mantenimiento). Para las…</a:t>
             </a:r>
           </a:p>
         </p:txBody>
@@ -4643,7 +5140,7 @@
                   <a:srgbClr val="0B3D2E"/>
                 </a:solidFill>
               </a:rPr>
-              <a:t>📝 Reto verificable</a:t>
+              <a:t>🧪 Laboratorio guiado</a:t>
             </a:r>
           </a:p>
         </p:txBody>
@@ -4681,22 +5178,97 @@
                   <a:srgbClr val="22282E"/>
                 </a:solidFill>
               </a:rPr>
-              <a:t>•  Construye triage.ps1, un script de recolección para respuesta a incidentes que genere un informe (CSV o JSON) con: procesos y sus rutas, servicios en ejecución, conexiones de red en escucha, usuarios locales y entradas de auto-inicio. Habilita Script Block Logging y demuestra que la ejecución del script queda registrada en el evento 4104.</a:t>
-            </a:r>
-          </a:p>
-          <a:p>
-            <a:pPr>
-              <a:spcAft>
-                <a:spcPts val="600"/>
-              </a:spcAft>
-            </a:pPr>
-            <a:r>
-              <a:rPr sz="1500">
-                <a:solidFill>
-                  <a:srgbClr val="22282E"/>
-                </a:solidFill>
-              </a:rPr>
-              <a:t>•  Criterio de aceptación: el script produce un informe estructurado sin errores en la VM, y en el registro Microsoft-Windows-PowerShell/Operational aparece un evento 4104 correspondiente a su ejecución. Otro alumno puede correr el script y obtener un informe equivalente.</a:t>
+              <a:t>•  Descubrir el entorno y aprender a autodescubrir:</a:t>
+            </a:r>
+          </a:p>
+          <a:p>
+            <a:pPr>
+              <a:spcAft>
+                <a:spcPts val="600"/>
+              </a:spcAft>
+            </a:pPr>
+            <a:r>
+              <a:rPr sz="1500">
+                <a:solidFill>
+                  <a:srgbClr val="22282E"/>
+                </a:solidFill>
+              </a:rPr>
+              <a:t>•  Consultas de sistema (uso defensivo y forense) apoyándote en la tubería de objetos:</a:t>
+            </a:r>
+          </a:p>
+          <a:p>
+            <a:pPr>
+              <a:spcAft>
+                <a:spcPts val="600"/>
+              </a:spcAft>
+            </a:pPr>
+            <a:r>
+              <a:rPr sz="1500">
+                <a:solidFill>
+                  <a:srgbClr val="22282E"/>
+                </a:solidFill>
+              </a:rPr>
+              <a:t>•  Eventos de seguridad. Últimos fallos de inicio de sesión, filtrando en el origen:</a:t>
+            </a:r>
+          </a:p>
+          <a:p>
+            <a:pPr>
+              <a:spcAft>
+                <a:spcPts val="600"/>
+              </a:spcAft>
+            </a:pPr>
+            <a:r>
+              <a:rPr sz="1500">
+                <a:solidFill>
+                  <a:srgbClr val="22282E"/>
+                </a:solidFill>
+              </a:rPr>
+              <a:t>•  Execution Policy. Compruébala y razona por qué no impide todo:</a:t>
+            </a:r>
+          </a:p>
+          <a:p>
+            <a:pPr>
+              <a:spcAft>
+                <a:spcPts val="600"/>
+              </a:spcAft>
+            </a:pPr>
+            <a:r>
+              <a:rPr sz="1500">
+                <a:solidFill>
+                  <a:srgbClr val="22282E"/>
+                </a:solidFill>
+              </a:rPr>
+              <a:t>•  Reflexiona: -ExecutionPolicy Bypass la anula sin permisos especiales.</a:t>
+            </a:r>
+          </a:p>
+          <a:p>
+            <a:pPr>
+              <a:spcAft>
+                <a:spcPts val="600"/>
+              </a:spcAft>
+            </a:pPr>
+            <a:r>
+              <a:rPr sz="1500">
+                <a:solidFill>
+                  <a:srgbClr val="22282E"/>
+                </a:solidFill>
+              </a:rPr>
+              <a:t>•  Activar defensas. Habilita Script Block Logging por directiva local (Configuración del equipo → Plantillas administrativas → Componentes de Windows → Windows PowerShell). Ejecuta un script y verifica…</a:t>
+            </a:r>
+          </a:p>
+          <a:p>
+            <a:pPr>
+              <a:spcAft>
+                <a:spcPts val="600"/>
+              </a:spcAft>
+            </a:pPr>
+            <a:r>
+              <a:rPr sz="1500">
+                <a:solidFill>
+                  <a:srgbClr val="22282E"/>
+                </a:solidFill>
+              </a:rPr>
+              <a:t>•  Script de recolección IR. Crea recolectar.ps1 que exporte a CSV los procesos con sus rutas, los servicios en ejecución y las conexiones de red en escucha, todo con marca de tiempo.</a:t>
             </a:r>
           </a:p>
         </p:txBody>
